--- a/classes/parte-8-blue-team-deteccion-y-soc/185-elastic-stack-y-wazuh/clase-185-presentacion.pptx
+++ b/classes/parte-8-blue-team-deteccion-y-soc/185-elastic-stack-y-wazuh/clase-185-presentacion.pptx
@@ -17,6 +17,11 @@
     <p:sldId id="265" r:id="rId16"/>
     <p:sldId id="266" r:id="rId17"/>
     <p:sldId id="267" r:id="rId18"/>
+    <p:sldId id="268" r:id="rId19"/>
+    <p:sldId id="269" r:id="rId20"/>
+    <p:sldId id="270" r:id="rId21"/>
+    <p:sldId id="271" r:id="rId22"/>
+    <p:sldId id="272" r:id="rId23"/>
   </p:sldIdLst>
   <p:sldSz cx="9144000" cy="6858000" type="screen4x3"/>
   <p:notesSz cx="6858000" cy="9144000"/>
@@ -3198,7 +3203,7 @@
                   <a:srgbClr val="0B3D2E"/>
                 </a:solidFill>
               </a:rPr>
-              <a:t>⚠️ Errores comunes</a:t>
+              <a:t>🧰 Herramientas y preparación</a:t>
             </a:r>
           </a:p>
         </p:txBody>
@@ -3236,67 +3241,82 @@
                   <a:srgbClr val="22282E"/>
                 </a:solidFill>
               </a:rPr>
-              <a:t>•  Kibana no arranca / maxmapcount — Falta vm.maxmapcount=262144; ajústalo en el host</a:t>
-            </a:r>
-          </a:p>
-          <a:p>
-            <a:pPr>
-              <a:spcAft>
-                <a:spcPts val="600"/>
-              </a:spcAft>
-            </a:pPr>
-            <a:r>
-              <a:rPr sz="1500">
-                <a:solidFill>
-                  <a:srgbClr val="22282E"/>
-                </a:solidFill>
-              </a:rPr>
-              <a:t>•  Beats no envía datos — Certificados/usuario mal configurados; revisa output.elasticsearch</a:t>
-            </a:r>
-          </a:p>
-          <a:p>
-            <a:pPr>
-              <a:spcAft>
-                <a:spcPts val="600"/>
-              </a:spcAft>
-            </a:pPr>
-            <a:r>
-              <a:rPr sz="1500">
-                <a:solidFill>
-                  <a:srgbClr val="22282E"/>
-                </a:solidFill>
-              </a:rPr>
-              <a:t>•  EQL no encuentra secuencias — Falta by field común o datos sin ECS; normaliza primero</a:t>
-            </a:r>
-          </a:p>
-          <a:p>
-            <a:pPr>
-              <a:spcAft>
-                <a:spcPts val="600"/>
-              </a:spcAft>
-            </a:pPr>
-            <a:r>
-              <a:rPr sz="1500">
-                <a:solidFill>
-                  <a:srgbClr val="22282E"/>
-                </a:solidFill>
-              </a:rPr>
-              <a:t>•  Agente Wazuh "Never connected" — Puerto 1514/1515 bloqueado o clave no registrada; re-registra el agente</a:t>
-            </a:r>
-          </a:p>
-          <a:p>
-            <a:pPr>
-              <a:spcAft>
-                <a:spcPts val="600"/>
-              </a:spcAft>
-            </a:pPr>
-            <a:r>
-              <a:rPr sz="1500">
-                <a:solidFill>
-                  <a:srgbClr val="22282E"/>
-                </a:solidFill>
-              </a:rPr>
-              <a:t>•  Índice rojo en ES — Disco lleno o shards sin asignar; libera espacio o ajusta réplicas</a:t>
+              <a:t>•  En laboratorio aislado:</a:t>
+            </a:r>
+          </a:p>
+          <a:p>
+            <a:pPr>
+              <a:spcAft>
+                <a:spcPts val="600"/>
+              </a:spcAft>
+            </a:pPr>
+            <a:r>
+              <a:rPr sz="1500">
+                <a:solidFill>
+                  <a:srgbClr val="22282E"/>
+                </a:solidFill>
+              </a:rPr>
+              <a:t>•  Elastic Stack vía Docker (docker-compose oficial de Elastic) o la instalación de Elastic Security.</a:t>
+            </a:r>
+          </a:p>
+          <a:p>
+            <a:pPr>
+              <a:spcAft>
+                <a:spcPts val="600"/>
+              </a:spcAft>
+            </a:pPr>
+            <a:r>
+              <a:rPr sz="1500">
+                <a:solidFill>
+                  <a:srgbClr val="22282E"/>
+                </a:solidFill>
+              </a:rPr>
+              <a:t>•  Winlogbeat/Filebeat/Packetbeat en tus máquinas de prueba.</a:t>
+            </a:r>
+          </a:p>
+          <a:p>
+            <a:pPr>
+              <a:spcAft>
+                <a:spcPts val="600"/>
+              </a:spcAft>
+            </a:pPr>
+            <a:r>
+              <a:rPr sz="1500">
+                <a:solidFill>
+                  <a:srgbClr val="22282E"/>
+                </a:solidFill>
+              </a:rPr>
+              <a:t>•  Wazuh con su despliegue Docker de un solo nodo (manager + indexer + dashboard).</a:t>
+            </a:r>
+          </a:p>
+          <a:p>
+            <a:pPr>
+              <a:spcAft>
+                <a:spcPts val="600"/>
+              </a:spcAft>
+            </a:pPr>
+            <a:r>
+              <a:rPr sz="1500">
+                <a:solidFill>
+                  <a:srgbClr val="22282E"/>
+                </a:solidFill>
+              </a:rPr>
+              <a:t>•  Agente Wazuh instalado en el Windows y el Linux de laboratorio.</a:t>
+            </a:r>
+          </a:p>
+          <a:p>
+            <a:pPr>
+              <a:spcAft>
+                <a:spcPts val="600"/>
+              </a:spcAft>
+            </a:pPr>
+            <a:r>
+              <a:rPr sz="1500">
+                <a:solidFill>
+                  <a:srgbClr val="22282E"/>
+                </a:solidFill>
+              </a:rPr>
+              <a:t>•  Todo dentro de tu red de pruebas; el FIM y la detección se prueban con cambios que tú mismo provocas.</a:t>
             </a:r>
           </a:p>
         </p:txBody>
@@ -3347,7 +3367,7 @@
                   <a:srgbClr val="0B3D2E"/>
                 </a:solidFill>
               </a:rPr>
-              <a:t>❓ Preguntas frecuentes</a:t>
+              <a:t>🧪 Laboratorio guiado — Doble stack de detección</a:t>
             </a:r>
           </a:p>
         </p:txBody>
@@ -3385,82 +3405,97 @@
                   <a:srgbClr val="22282E"/>
                 </a:solidFill>
               </a:rPr>
-              <a:t>•  ❓ ¿Elastic o Wazuh para empezar?</a:t>
-            </a:r>
-          </a:p>
-          <a:p>
-            <a:pPr>
-              <a:spcAft>
-                <a:spcPts val="600"/>
-              </a:spcAft>
-            </a:pPr>
-            <a:r>
-              <a:rPr sz="1500">
-                <a:solidFill>
-                  <a:srgbClr val="22282E"/>
-                </a:solidFill>
-              </a:rPr>
-              <a:t>•  Wazuh trae reglas, agente y mapeo ATT&amp;CK listos, ideal para arrancar rápido. Elastic da más flexibilidad de consulta (EQL) y un ecosistema de detección amplio. En laboratorio, prueba ambos.</a:t>
-            </a:r>
-          </a:p>
-          <a:p>
-            <a:pPr>
-              <a:spcAft>
-                <a:spcPts val="600"/>
-              </a:spcAft>
-            </a:pPr>
-            <a:r>
-              <a:rPr sz="1500">
-                <a:solidFill>
-                  <a:srgbClr val="22282E"/>
-                </a:solidFill>
-              </a:rPr>
-              <a:t>•  ❓ ¿Wazuh usa Elasticsearch?</a:t>
-            </a:r>
-          </a:p>
-          <a:p>
-            <a:pPr>
-              <a:spcAft>
-                <a:spcPts val="600"/>
-              </a:spcAft>
-            </a:pPr>
-            <a:r>
-              <a:rPr sz="1500">
-                <a:solidFill>
-                  <a:srgbClr val="22282E"/>
-                </a:solidFill>
-              </a:rPr>
-              <a:t>•  Las versiones recientes incluyen su propio Wazuh Indexer (fork de OpenSearch/Elasticsearch), así que funciona de forma autónoma sin depender de Elastic.</a:t>
-            </a:r>
-          </a:p>
-          <a:p>
-            <a:pPr>
-              <a:spcAft>
-                <a:spcPts val="600"/>
-              </a:spcAft>
-            </a:pPr>
-            <a:r>
-              <a:rPr sz="1500">
-                <a:solidFill>
-                  <a:srgbClr val="22282E"/>
-                </a:solidFill>
-              </a:rPr>
-              <a:t>•  ❓ ¿EQL sustituye a las reglas Sigma?</a:t>
-            </a:r>
-          </a:p>
-          <a:p>
-            <a:pPr>
-              <a:spcAft>
-                <a:spcPts val="600"/>
-              </a:spcAft>
-            </a:pPr>
-            <a:r>
-              <a:rPr sz="1500">
-                <a:solidFill>
-                  <a:srgbClr val="22282E"/>
-                </a:solidFill>
-              </a:rPr>
-              <a:t>•  No. Sigma es un formato portable de reglas (clase 186) que puedes convertir a EQL, KQL o SPL. EQL es el lenguaje nativo de Elastic al que Sigma se traduce.</a:t>
+              <a:t>•  Levanta Elastic. docker compose up -d con el stack oficial. Accede a Kibana y crea el usuario de kibana.</a:t>
+            </a:r>
+          </a:p>
+          <a:p>
+            <a:pPr>
+              <a:spcAft>
+                <a:spcPts val="600"/>
+              </a:spcAft>
+            </a:pPr>
+            <a:r>
+              <a:rPr sz="1500">
+                <a:solidFill>
+                  <a:srgbClr val="22282E"/>
+                </a:solidFill>
+              </a:rPr>
+              <a:t>•  Ingesta endpoint. Instala Winlogbeat con el módulo sysmon y verifica en Discover que llegan eventos ECS (process.commandline).</a:t>
+            </a:r>
+          </a:p>
+          <a:p>
+            <a:pPr>
+              <a:spcAft>
+                <a:spcPts val="600"/>
+              </a:spcAft>
+            </a:pPr>
+            <a:r>
+              <a:rPr sz="1500">
+                <a:solidFill>
+                  <a:srgbClr val="22282E"/>
+                </a:solidFill>
+              </a:rPr>
+              <a:t>•  Consulta con KQL. En Discover: event.code:1 and process.parent.name:"WINWORD.EXE" and process.name:("powershell.exe" or "cmd.exe").</a:t>
+            </a:r>
+          </a:p>
+          <a:p>
+            <a:pPr>
+              <a:spcAft>
+                <a:spcPts val="600"/>
+              </a:spcAft>
+            </a:pPr>
+            <a:r>
+              <a:rPr sz="1500">
+                <a:solidFill>
+                  <a:srgbClr val="22282E"/>
+                </a:solidFill>
+              </a:rPr>
+              <a:t>•  Detecta secuencias con EQL. En Elastic Security escribe una regla EQL:</a:t>
+            </a:r>
+          </a:p>
+          <a:p>
+            <a:pPr>
+              <a:spcAft>
+                <a:spcPts val="600"/>
+              </a:spcAft>
+            </a:pPr>
+            <a:r>
+              <a:rPr sz="1500">
+                <a:solidFill>
+                  <a:srgbClr val="22282E"/>
+                </a:solidFill>
+              </a:rPr>
+              <a:t>•  sequence by host.id [process where process.name=="powershell.exe"] [network where destination.port==443]</a:t>
+            </a:r>
+          </a:p>
+          <a:p>
+            <a:pPr>
+              <a:spcAft>
+                <a:spcPts val="600"/>
+              </a:spcAft>
+            </a:pPr>
+            <a:r>
+              <a:rPr sz="1500">
+                <a:solidFill>
+                  <a:srgbClr val="22282E"/>
+                </a:solidFill>
+              </a:rPr>
+              <a:t>•  Levanta Wazuh. Despliega el stack Docker de Wazuh; instala el agente en tus máquinas y confírmalo en el dashboard.</a:t>
+            </a:r>
+          </a:p>
+          <a:p>
+            <a:pPr>
+              <a:spcAft>
+                <a:spcPts val="600"/>
+              </a:spcAft>
+            </a:pPr>
+            <a:r>
+              <a:rPr sz="1500">
+                <a:solidFill>
+                  <a:srgbClr val="22282E"/>
+                </a:solidFill>
+              </a:rPr>
+              <a:t>•  Provoca una alerta. Modifica un archivo monitoreado por FIM (/etc/passwd o una carpeta bajo vigilancia) y observa la alerta con su nivel y regla.</a:t>
             </a:r>
           </a:p>
         </p:txBody>
@@ -3511,7 +3546,7 @@
                   <a:srgbClr val="0B3D2E"/>
                 </a:solidFill>
               </a:rPr>
-              <a:t>🔗 Referencias</a:t>
+              <a:t>✍️ Ejercicios</a:t>
             </a:r>
           </a:p>
         </p:txBody>
@@ -3549,71 +3584,727 @@
                   <a:srgbClr val="22282E"/>
                 </a:solidFill>
               </a:rPr>
-              <a:t>•  Elastic Security docs — &lt;https://www.elastic.co/guide/en/security/current/index.html&gt;</a:t>
-            </a:r>
-          </a:p>
-          <a:p>
-            <a:pPr>
-              <a:spcAft>
-                <a:spcPts val="600"/>
-              </a:spcAft>
-            </a:pPr>
-            <a:r>
-              <a:rPr sz="1500">
-                <a:solidFill>
-                  <a:srgbClr val="22282E"/>
-                </a:solidFill>
-              </a:rPr>
-              <a:t>•  EQL syntax reference — &lt;https://www.elastic.co/guide/en/elasticsearch/reference/current/eql.html&gt;</a:t>
-            </a:r>
-          </a:p>
-          <a:p>
-            <a:pPr>
-              <a:spcAft>
-                <a:spcPts val="600"/>
-              </a:spcAft>
-            </a:pPr>
-            <a:r>
-              <a:rPr sz="1500">
-                <a:solidFill>
-                  <a:srgbClr val="22282E"/>
-                </a:solidFill>
-              </a:rPr>
-              <a:t>•  Wazuh Documentation — &lt;https://documentation.wazuh.com/&gt;</a:t>
-            </a:r>
-          </a:p>
-          <a:p>
-            <a:pPr>
-              <a:spcAft>
-                <a:spcPts val="600"/>
-              </a:spcAft>
-            </a:pPr>
-            <a:r>
-              <a:rPr sz="1500">
-                <a:solidFill>
-                  <a:srgbClr val="22282E"/>
-                </a:solidFill>
-              </a:rPr>
-              <a:t>•  Elastic Common Schema (ECS) — &lt;https://www.elastic.co/guide/en/ecs/current/index.html&gt;</a:t>
-            </a:r>
-          </a:p>
-          <a:p>
-            <a:pPr>
-              <a:spcAft>
-                <a:spcPts val="600"/>
-              </a:spcAft>
-            </a:pPr>
-            <a:r>
-              <a:rPr sz="1500">
-                <a:solidFill>
-                  <a:srgbClr val="22282E"/>
-                </a:solidFill>
-              </a:rPr>
-              <a:t>•  Sanders, C. y Smith, J. Applied Network Security Monitoring. Syngress.</a:t>
-            </a:r>
-          </a:p>
-        </p:txBody>
-      </p:sp>
+              <a:t>•  Escribe 3 consultas KQL para hunting de PowerShell ofuscado.</a:t>
+            </a:r>
+          </a:p>
+          <a:p>
+            <a:pPr>
+              <a:spcAft>
+                <a:spcPts val="600"/>
+              </a:spcAft>
+            </a:pPr>
+            <a:r>
+              <a:rPr sz="1500">
+                <a:solidFill>
+                  <a:srgbClr val="22282E"/>
+                </a:solidFill>
+              </a:rPr>
+              <a:t>•  Traduce una detección de la clase 184 (Splunk SPL) a EQL de Elastic.</a:t>
+            </a:r>
+          </a:p>
+          <a:p>
+            <a:pPr>
+              <a:spcAft>
+                <a:spcPts val="600"/>
+              </a:spcAft>
+            </a:pPr>
+            <a:r>
+              <a:rPr sz="1500">
+                <a:solidFill>
+                  <a:srgbClr val="22282E"/>
+                </a:solidFill>
+              </a:rPr>
+              <a:t>•  Explica la diferencia entre un decoder y una regla en Wazuh con un ejemplo.</a:t>
+            </a:r>
+          </a:p>
+          <a:p>
+            <a:pPr>
+              <a:spcAft>
+                <a:spcPts val="600"/>
+              </a:spcAft>
+            </a:pPr>
+            <a:r>
+              <a:rPr sz="1500">
+                <a:solidFill>
+                  <a:srgbClr val="22282E"/>
+                </a:solidFill>
+              </a:rPr>
+              <a:t>•  Habilita FIM sobre una carpeta y documenta la alerta generada.</a:t>
+            </a:r>
+          </a:p>
+          <a:p>
+            <a:pPr>
+              <a:spcAft>
+                <a:spcPts val="600"/>
+              </a:spcAft>
+            </a:pPr>
+            <a:r>
+              <a:rPr sz="1500">
+                <a:solidFill>
+                  <a:srgbClr val="22282E"/>
+                </a:solidFill>
+              </a:rPr>
+              <a:t>•  Compara Elastic vs Wazuh vs Splunk en coste, curva de aprendizaje y capacidades.</a:t>
+            </a:r>
+          </a:p>
+          <a:p>
+            <a:pPr>
+              <a:spcAft>
+                <a:spcPts val="600"/>
+              </a:spcAft>
+            </a:pPr>
+            <a:r>
+              <a:rPr sz="1500">
+                <a:solidFill>
+                  <a:srgbClr val="22282E"/>
+                </a:solidFill>
+              </a:rPr>
+              <a:t>•  Crea una regla local de Wazuh que eleve la severidad de un patrón concreto.</a:t>
+            </a:r>
+          </a:p>
+        </p:txBody>
+      </p:sp>
+    </p:spTree>
+  </p:cSld>
+  <p:clrMapOvr>
+    <a:masterClrMapping/>
+  </p:clrMapOvr>
+</p:sld>
+</file>
+
+<file path=ppt/slides/slide13.xml><?xml version="1.0" encoding="utf-8"?>
+<p:sld xmlns:a="http://schemas.openxmlformats.org/drawingml/2006/main" xmlns:p="http://schemas.openxmlformats.org/presentationml/2006/main" xmlns:r="http://schemas.openxmlformats.org/officeDocument/2006/relationships">
+  <p:cSld>
+    <p:spTree>
+      <p:nvGrpSpPr>
+        <p:cNvPr id="1" name=""/>
+        <p:cNvGrpSpPr/>
+        <p:nvPr/>
+      </p:nvGrpSpPr>
+      <p:grpSpPr/>
+      <p:sp>
+        <p:nvSpPr>
+          <p:cNvPr id="2" name="TextBox 1"/>
+          <p:cNvSpPr txBox="1"/>
+          <p:nvPr/>
+        </p:nvSpPr>
+        <p:spPr>
+          <a:xfrm>
+            <a:off x="457200" y="320040"/>
+            <a:ext cx="8229600" cy="822960"/>
+          </a:xfrm>
+          <a:prstGeom prst="rect">
+            <a:avLst/>
+          </a:prstGeom>
+          <a:noFill/>
+        </p:spPr>
+        <p:txBody>
+          <a:bodyPr wrap="square">
+            <a:spAutoFit/>
+          </a:bodyPr>
+          <a:lstStyle/>
+          <a:p>
+            <a:r>
+              <a:rPr sz="2600" b="1">
+                <a:solidFill>
+                  <a:srgbClr val="0B3D2E"/>
+                </a:solidFill>
+              </a:rPr>
+              <a:t>📝 Reto verificable</a:t>
+            </a:r>
+          </a:p>
+        </p:txBody>
+      </p:sp>
+      <p:sp>
+        <p:nvSpPr>
+          <p:cNvPr id="3" name="TextBox 2"/>
+          <p:cNvSpPr txBox="1"/>
+          <p:nvPr/>
+        </p:nvSpPr>
+        <p:spPr>
+          <a:xfrm>
+            <a:off x="457200" y="1280160"/>
+            <a:ext cx="8229600" cy="4937760"/>
+          </a:xfrm>
+          <a:prstGeom prst="rect">
+            <a:avLst/>
+          </a:prstGeom>
+          <a:noFill/>
+        </p:spPr>
+        <p:txBody>
+          <a:bodyPr wrap="square">
+            <a:spAutoFit/>
+          </a:bodyPr>
+          <a:lstStyle/>
+          <a:p>
+            <a:pPr>
+              <a:spcAft>
+                <a:spcPts val="600"/>
+              </a:spcAft>
+            </a:pPr>
+            <a:r>
+              <a:rPr sz="1500">
+                <a:solidFill>
+                  <a:srgbClr val="22282E"/>
+                </a:solidFill>
+              </a:rPr>
+              <a:t>•  Despliega ambos stacks y demuestra una detección en cada uno: una regla EQL en Elastic que capture una secuencia proceso→red, y una alerta de Wazuh (FIM o regla) con su técnica ATT&amp;CK. Criterio de…</a:t>
+            </a:r>
+          </a:p>
+        </p:txBody>
+      </p:sp>
+    </p:spTree>
+  </p:cSld>
+  <p:clrMapOvr>
+    <a:masterClrMapping/>
+  </p:clrMapOvr>
+</p:sld>
+</file>
+
+<file path=ppt/slides/slide14.xml><?xml version="1.0" encoding="utf-8"?>
+<p:sld xmlns:a="http://schemas.openxmlformats.org/drawingml/2006/main" xmlns:p="http://schemas.openxmlformats.org/presentationml/2006/main" xmlns:r="http://schemas.openxmlformats.org/officeDocument/2006/relationships">
+  <p:cSld>
+    <p:spTree>
+      <p:nvGrpSpPr>
+        <p:cNvPr id="1" name=""/>
+        <p:cNvGrpSpPr/>
+        <p:nvPr/>
+      </p:nvGrpSpPr>
+      <p:grpSpPr/>
+      <p:sp>
+        <p:nvSpPr>
+          <p:cNvPr id="2" name="TextBox 1"/>
+          <p:cNvSpPr txBox="1"/>
+          <p:nvPr/>
+        </p:nvSpPr>
+        <p:spPr>
+          <a:xfrm>
+            <a:off x="457200" y="320040"/>
+            <a:ext cx="8229600" cy="822960"/>
+          </a:xfrm>
+          <a:prstGeom prst="rect">
+            <a:avLst/>
+          </a:prstGeom>
+          <a:noFill/>
+        </p:spPr>
+        <p:txBody>
+          <a:bodyPr wrap="square">
+            <a:spAutoFit/>
+          </a:bodyPr>
+          <a:lstStyle/>
+          <a:p>
+            <a:r>
+              <a:rPr sz="2600" b="1">
+                <a:solidFill>
+                  <a:srgbClr val="0B3D2E"/>
+                </a:solidFill>
+              </a:rPr>
+              <a:t>⚠️ Errores comunes</a:t>
+            </a:r>
+          </a:p>
+        </p:txBody>
+      </p:sp>
+      <p:sp>
+        <p:nvSpPr>
+          <p:cNvPr id="3" name="TextBox 2"/>
+          <p:cNvSpPr txBox="1"/>
+          <p:nvPr/>
+        </p:nvSpPr>
+        <p:spPr>
+          <a:xfrm>
+            <a:off x="457200" y="1280160"/>
+            <a:ext cx="8229600" cy="4937760"/>
+          </a:xfrm>
+          <a:prstGeom prst="rect">
+            <a:avLst/>
+          </a:prstGeom>
+          <a:noFill/>
+        </p:spPr>
+        <p:txBody>
+          <a:bodyPr wrap="square">
+            <a:spAutoFit/>
+          </a:bodyPr>
+          <a:lstStyle/>
+          <a:p>
+            <a:pPr>
+              <a:spcAft>
+                <a:spcPts val="600"/>
+              </a:spcAft>
+            </a:pPr>
+            <a:r>
+              <a:rPr sz="1500">
+                <a:solidFill>
+                  <a:srgbClr val="22282E"/>
+                </a:solidFill>
+              </a:rPr>
+              <a:t>•  Kibana no arranca / maxmapcount — Falta vm.maxmapcount=262144; ajústalo en el host</a:t>
+            </a:r>
+          </a:p>
+          <a:p>
+            <a:pPr>
+              <a:spcAft>
+                <a:spcPts val="600"/>
+              </a:spcAft>
+            </a:pPr>
+            <a:r>
+              <a:rPr sz="1500">
+                <a:solidFill>
+                  <a:srgbClr val="22282E"/>
+                </a:solidFill>
+              </a:rPr>
+              <a:t>•  Beats no envía datos — Certificados/usuario mal configurados; revisa output.elasticsearch</a:t>
+            </a:r>
+          </a:p>
+          <a:p>
+            <a:pPr>
+              <a:spcAft>
+                <a:spcPts val="600"/>
+              </a:spcAft>
+            </a:pPr>
+            <a:r>
+              <a:rPr sz="1500">
+                <a:solidFill>
+                  <a:srgbClr val="22282E"/>
+                </a:solidFill>
+              </a:rPr>
+              <a:t>•  EQL no encuentra secuencias — Falta by field común o datos sin ECS; normaliza primero</a:t>
+            </a:r>
+          </a:p>
+          <a:p>
+            <a:pPr>
+              <a:spcAft>
+                <a:spcPts val="600"/>
+              </a:spcAft>
+            </a:pPr>
+            <a:r>
+              <a:rPr sz="1500">
+                <a:solidFill>
+                  <a:srgbClr val="22282E"/>
+                </a:solidFill>
+              </a:rPr>
+              <a:t>•  Agente Wazuh "Never connected" — Puerto 1514/1515 bloqueado o clave no registrada; re-registra el agente</a:t>
+            </a:r>
+          </a:p>
+          <a:p>
+            <a:pPr>
+              <a:spcAft>
+                <a:spcPts val="600"/>
+              </a:spcAft>
+            </a:pPr>
+            <a:r>
+              <a:rPr sz="1500">
+                <a:solidFill>
+                  <a:srgbClr val="22282E"/>
+                </a:solidFill>
+              </a:rPr>
+              <a:t>•  Índice rojo en ES — Disco lleno o shards sin asignar; libera espacio o ajusta réplicas</a:t>
+            </a:r>
+          </a:p>
+        </p:txBody>
+      </p:sp>
+    </p:spTree>
+  </p:cSld>
+  <p:clrMapOvr>
+    <a:masterClrMapping/>
+  </p:clrMapOvr>
+</p:sld>
+</file>
+
+<file path=ppt/slides/slide15.xml><?xml version="1.0" encoding="utf-8"?>
+<p:sld xmlns:a="http://schemas.openxmlformats.org/drawingml/2006/main" xmlns:p="http://schemas.openxmlformats.org/presentationml/2006/main" xmlns:r="http://schemas.openxmlformats.org/officeDocument/2006/relationships">
+  <p:cSld>
+    <p:spTree>
+      <p:nvGrpSpPr>
+        <p:cNvPr id="1" name=""/>
+        <p:cNvGrpSpPr/>
+        <p:nvPr/>
+      </p:nvGrpSpPr>
+      <p:grpSpPr/>
+      <p:sp>
+        <p:nvSpPr>
+          <p:cNvPr id="2" name="TextBox 1"/>
+          <p:cNvSpPr txBox="1"/>
+          <p:nvPr/>
+        </p:nvSpPr>
+        <p:spPr>
+          <a:xfrm>
+            <a:off x="457200" y="320040"/>
+            <a:ext cx="8229600" cy="822960"/>
+          </a:xfrm>
+          <a:prstGeom prst="rect">
+            <a:avLst/>
+          </a:prstGeom>
+          <a:noFill/>
+        </p:spPr>
+        <p:txBody>
+          <a:bodyPr wrap="square">
+            <a:spAutoFit/>
+          </a:bodyPr>
+          <a:lstStyle/>
+          <a:p>
+            <a:r>
+              <a:rPr sz="2600" b="1">
+                <a:solidFill>
+                  <a:srgbClr val="0B3D2E"/>
+                </a:solidFill>
+              </a:rPr>
+              <a:t>❓ Preguntas frecuentes</a:t>
+            </a:r>
+          </a:p>
+        </p:txBody>
+      </p:sp>
+      <p:sp>
+        <p:nvSpPr>
+          <p:cNvPr id="3" name="TextBox 2"/>
+          <p:cNvSpPr txBox="1"/>
+          <p:nvPr/>
+        </p:nvSpPr>
+        <p:spPr>
+          <a:xfrm>
+            <a:off x="457200" y="1280160"/>
+            <a:ext cx="8229600" cy="4937760"/>
+          </a:xfrm>
+          <a:prstGeom prst="rect">
+            <a:avLst/>
+          </a:prstGeom>
+          <a:noFill/>
+        </p:spPr>
+        <p:txBody>
+          <a:bodyPr wrap="square">
+            <a:spAutoFit/>
+          </a:bodyPr>
+          <a:lstStyle/>
+          <a:p>
+            <a:pPr>
+              <a:spcAft>
+                <a:spcPts val="600"/>
+              </a:spcAft>
+            </a:pPr>
+            <a:r>
+              <a:rPr sz="1500">
+                <a:solidFill>
+                  <a:srgbClr val="22282E"/>
+                </a:solidFill>
+              </a:rPr>
+              <a:t>•  ❓ ¿Elastic o Wazuh para empezar?</a:t>
+            </a:r>
+          </a:p>
+          <a:p>
+            <a:pPr>
+              <a:spcAft>
+                <a:spcPts val="600"/>
+              </a:spcAft>
+            </a:pPr>
+            <a:r>
+              <a:rPr sz="1500">
+                <a:solidFill>
+                  <a:srgbClr val="22282E"/>
+                </a:solidFill>
+              </a:rPr>
+              <a:t>•  Wazuh trae reglas, agente y mapeo ATT&amp;CK listos, ideal para arrancar rápido. Elastic da más flexibilidad de consulta (EQL) y un ecosistema de detección amplio. En laboratorio, prueba ambos.</a:t>
+            </a:r>
+          </a:p>
+          <a:p>
+            <a:pPr>
+              <a:spcAft>
+                <a:spcPts val="600"/>
+              </a:spcAft>
+            </a:pPr>
+            <a:r>
+              <a:rPr sz="1500">
+                <a:solidFill>
+                  <a:srgbClr val="22282E"/>
+                </a:solidFill>
+              </a:rPr>
+              <a:t>•  ❓ ¿Wazuh usa Elasticsearch?</a:t>
+            </a:r>
+          </a:p>
+          <a:p>
+            <a:pPr>
+              <a:spcAft>
+                <a:spcPts val="600"/>
+              </a:spcAft>
+            </a:pPr>
+            <a:r>
+              <a:rPr sz="1500">
+                <a:solidFill>
+                  <a:srgbClr val="22282E"/>
+                </a:solidFill>
+              </a:rPr>
+              <a:t>•  Las versiones recientes incluyen su propio Wazuh Indexer (fork de OpenSearch/Elasticsearch), así que funciona de forma autónoma sin depender de Elastic.</a:t>
+            </a:r>
+          </a:p>
+          <a:p>
+            <a:pPr>
+              <a:spcAft>
+                <a:spcPts val="600"/>
+              </a:spcAft>
+            </a:pPr>
+            <a:r>
+              <a:rPr sz="1500">
+                <a:solidFill>
+                  <a:srgbClr val="22282E"/>
+                </a:solidFill>
+              </a:rPr>
+              <a:t>•  ❓ ¿EQL sustituye a las reglas Sigma?</a:t>
+            </a:r>
+          </a:p>
+          <a:p>
+            <a:pPr>
+              <a:spcAft>
+                <a:spcPts val="600"/>
+              </a:spcAft>
+            </a:pPr>
+            <a:r>
+              <a:rPr sz="1500">
+                <a:solidFill>
+                  <a:srgbClr val="22282E"/>
+                </a:solidFill>
+              </a:rPr>
+              <a:t>•  No. Sigma es un formato portable de reglas (clase 186) que puedes convertir a EQL, KQL o SPL. EQL es el lenguaje nativo de Elastic al que Sigma se traduce.</a:t>
+            </a:r>
+          </a:p>
+        </p:txBody>
+      </p:sp>
+    </p:spTree>
+  </p:cSld>
+  <p:clrMapOvr>
+    <a:masterClrMapping/>
+  </p:clrMapOvr>
+</p:sld>
+</file>
+
+<file path=ppt/slides/slide16.xml><?xml version="1.0" encoding="utf-8"?>
+<p:sld xmlns:a="http://schemas.openxmlformats.org/drawingml/2006/main" xmlns:p="http://schemas.openxmlformats.org/presentationml/2006/main" xmlns:r="http://schemas.openxmlformats.org/officeDocument/2006/relationships">
+  <p:cSld>
+    <p:spTree>
+      <p:nvGrpSpPr>
+        <p:cNvPr id="1" name=""/>
+        <p:cNvGrpSpPr/>
+        <p:nvPr/>
+      </p:nvGrpSpPr>
+      <p:grpSpPr/>
+      <p:sp>
+        <p:nvSpPr>
+          <p:cNvPr id="2" name="TextBox 1"/>
+          <p:cNvSpPr txBox="1"/>
+          <p:nvPr/>
+        </p:nvSpPr>
+        <p:spPr>
+          <a:xfrm>
+            <a:off x="457200" y="320040"/>
+            <a:ext cx="8229600" cy="822960"/>
+          </a:xfrm>
+          <a:prstGeom prst="rect">
+            <a:avLst/>
+          </a:prstGeom>
+          <a:noFill/>
+        </p:spPr>
+        <p:txBody>
+          <a:bodyPr wrap="square">
+            <a:spAutoFit/>
+          </a:bodyPr>
+          <a:lstStyle/>
+          <a:p>
+            <a:r>
+              <a:rPr sz="2600" b="1">
+                <a:solidFill>
+                  <a:srgbClr val="0B3D2E"/>
+                </a:solidFill>
+              </a:rPr>
+              <a:t>🔗 Referencias verificables y alcance</a:t>
+            </a:r>
+          </a:p>
+        </p:txBody>
+      </p:sp>
+      <p:sp>
+        <p:nvSpPr>
+          <p:cNvPr id="3" name="TextBox 2"/>
+          <p:cNvSpPr txBox="1"/>
+          <p:nvPr/>
+        </p:nvSpPr>
+        <p:spPr>
+          <a:xfrm>
+            <a:off x="457200" y="1280160"/>
+            <a:ext cx="8229600" cy="4937760"/>
+          </a:xfrm>
+          <a:prstGeom prst="rect">
+            <a:avLst/>
+          </a:prstGeom>
+          <a:noFill/>
+        </p:spPr>
+        <p:txBody>
+          <a:bodyPr wrap="square">
+            <a:spAutoFit/>
+          </a:bodyPr>
+          <a:lstStyle/>
+          <a:p>
+            <a:pPr>
+              <a:spcAft>
+                <a:spcPts val="600"/>
+              </a:spcAft>
+            </a:pPr>
+            <a:r>
+              <a:rPr sz="1500">
+                <a:solidFill>
+                  <a:srgbClr val="22282E"/>
+                </a:solidFill>
+              </a:rPr>
+              <a:t>•  Elastic Security, creación de reglas: documentación oficial para tipos de regla, programación, previsualización y acciones — &lt;https://www.elastic.co/guide/en/security/current/rules-ui-create.html&gt;</a:t>
+            </a:r>
+          </a:p>
+          <a:p>
+            <a:pPr>
+              <a:spcAft>
+                <a:spcPts val="600"/>
+              </a:spcAft>
+            </a:pPr>
+            <a:r>
+              <a:rPr sz="1500">
+                <a:solidFill>
+                  <a:srgbClr val="22282E"/>
+                </a:solidFill>
+              </a:rPr>
+              <a:t>•  Elasticsearch EQL: referencia oficial de sintaxis para consultas de eventos y secuencias; su resultado depende del mapeo y de la categoría de evento —…</a:t>
+            </a:r>
+          </a:p>
+          <a:p>
+            <a:pPr>
+              <a:spcAft>
+                <a:spcPts val="600"/>
+              </a:spcAft>
+            </a:pPr>
+            <a:r>
+              <a:rPr sz="1500">
+                <a:solidFill>
+                  <a:srgbClr val="22282E"/>
+                </a:solidFill>
+              </a:rPr>
+              <a:t>•  Elastic Common Schema (ECS): especificación oficial de los campos normalizados usados por las consultas de la clase — &lt;https://www.elastic.co/guide/en/ecs/current/index.html&gt;</a:t>
+            </a:r>
+          </a:p>
+          <a:p>
+            <a:pPr>
+              <a:spcAft>
+                <a:spcPts val="600"/>
+              </a:spcAft>
+            </a:pPr>
+            <a:r>
+              <a:rPr sz="1500">
+                <a:solidFill>
+                  <a:srgbClr val="22282E"/>
+                </a:solidFill>
+              </a:rPr>
+              <a:t>•  Wazuh, componentes y flujo de datos: documentación oficial de agente, servidor, indexer y dashboard — &lt;https://documentation.wazuh.com/current/getting-started/components/index.html&gt;</a:t>
+            </a:r>
+          </a:p>
+          <a:p>
+            <a:pPr>
+              <a:spcAft>
+                <a:spcPts val="600"/>
+              </a:spcAft>
+            </a:pPr>
+            <a:r>
+              <a:rPr sz="1500">
+                <a:solidFill>
+                  <a:srgbClr val="22282E"/>
+                </a:solidFill>
+              </a:rPr>
+              <a:t>•  Wazuh, motor de análisis: documentación oficial sobre decoders, reglas y generación de alertas — &lt;https://documentation.wazuh.com/current/getting-started/components/wazuh-server.html&gt;</a:t>
+            </a:r>
+          </a:p>
+          <a:p>
+            <a:pPr>
+              <a:spcAft>
+                <a:spcPts val="600"/>
+              </a:spcAft>
+            </a:pPr>
+            <a:r>
+              <a:rPr sz="1500">
+                <a:solidFill>
+                  <a:srgbClr val="22282E"/>
+                </a:solidFill>
+              </a:rPr>
+              <a:t>•  Sanders, C. y Smith, J. Applied Network Security Monitoring. Syngress: bibliografía complementaria sobre investigación con telemetría.</a:t>
+            </a:r>
+          </a:p>
+        </p:txBody>
+      </p:sp>
+    </p:spTree>
+  </p:cSld>
+  <p:clrMapOvr>
+    <a:masterClrMapping/>
+  </p:clrMapOvr>
+</p:sld>
+</file>
+
+<file path=ppt/slides/slide17.xml><?xml version="1.0" encoding="utf-8"?>
+<p:sld xmlns:a="http://schemas.openxmlformats.org/drawingml/2006/main" xmlns:p="http://schemas.openxmlformats.org/presentationml/2006/main" xmlns:r="http://schemas.openxmlformats.org/officeDocument/2006/relationships">
+  <p:cSld>
+    <p:spTree>
+      <p:nvGrpSpPr>
+        <p:cNvPr id="1" name=""/>
+        <p:cNvGrpSpPr/>
+        <p:nvPr/>
+      </p:nvGrpSpPr>
+      <p:grpSpPr/>
+      <p:sp>
+        <p:nvSpPr>
+          <p:cNvPr id="2" name="TextBox 1"/>
+          <p:cNvSpPr txBox="1"/>
+          <p:nvPr/>
+        </p:nvSpPr>
+        <p:spPr>
+          <a:xfrm>
+            <a:off x="457200" y="274320"/>
+            <a:ext cx="8229600" cy="640080"/>
+          </a:xfrm>
+          <a:prstGeom prst="rect">
+            <a:avLst/>
+          </a:prstGeom>
+          <a:noFill/>
+        </p:spPr>
+        <p:txBody>
+          <a:bodyPr wrap="square">
+            <a:spAutoFit/>
+          </a:bodyPr>
+          <a:lstStyle/>
+          <a:p>
+            <a:r>
+              <a:rPr sz="2200" b="1">
+                <a:solidFill>
+                  <a:srgbClr val="0B3D2E"/>
+                </a:solidFill>
+              </a:rPr>
+              <a:t>Diagrama de la clase</a:t>
+            </a:r>
+          </a:p>
+        </p:txBody>
+      </p:sp>
+      <p:pic>
+        <p:nvPicPr>
+          <p:cNvPr id="3" name="Picture 2" descr="41a8376a26a96b8e.png"/>
+          <p:cNvPicPr>
+            <a:picLocks noChangeAspect="1"/>
+          </p:cNvPicPr>
+          <p:nvPr/>
+        </p:nvPicPr>
+        <p:blipFill>
+          <a:blip r:embed="rId2"/>
+          <a:stretch>
+            <a:fillRect/>
+          </a:stretch>
+        </p:blipFill>
+        <p:spPr>
+          <a:xfrm>
+            <a:off x="761792" y="1097280"/>
+            <a:ext cx="7620416" cy="5303520"/>
+          </a:xfrm>
+          <a:prstGeom prst="rect">
+            <a:avLst/>
+          </a:prstGeom>
+        </p:spPr>
+      </p:pic>
     </p:spTree>
   </p:cSld>
   <p:clrMapOvr>
@@ -3698,7 +4389,7 @@
                   <a:srgbClr val="22282E"/>
                 </a:solidFill>
               </a:rPr>
-              <a:t>•  Desplegar y operar un SIEM open source con Elastic Stack (Elasticsearch, Kibana, Beats) y Wazuh. Aprenderás a ingerir telemetría, escribir consultas KQL/EQL, y usar las reglas y el motor de detección de Wazuh como alternativa gratuita a soluciones comerciales, ideal para laboratorios y organizaciones con presupuesto limitado.</a:t>
+              <a:t>•  Desplegar y operar un SIEM open source con Elastic Stack (Elasticsearch, Kibana, Beats) y Wazuh. Aprenderás a ingerir telemetría, escribir consultas KQL/EQL, y usar las reglas y el motor de detección…</a:t>
             </a:r>
           </a:p>
         </p:txBody>
@@ -4092,7 +4783,7 @@
                   <a:srgbClr val="0B3D2E"/>
                 </a:solidFill>
               </a:rPr>
-              <a:t>📖 Definiciones y características</a:t>
+              <a:t>🧠 Explicación en profundidad</a:t>
             </a:r>
           </a:p>
         </p:txBody>
@@ -4130,97 +4821,97 @@
                   <a:srgbClr val="22282E"/>
                 </a:solidFill>
               </a:rPr>
-              <a:t>•  Elasticsearch: motor de búsqueda e indexación distribuido. Característica: búsquedas rápidas sobre grandes volúmenes vía índices invertidos.</a:t>
-            </a:r>
-          </a:p>
-          <a:p>
-            <a:pPr>
-              <a:spcAft>
-                <a:spcPts val="600"/>
-              </a:spcAft>
-            </a:pPr>
-            <a:r>
-              <a:rPr sz="1500">
-                <a:solidFill>
-                  <a:srgbClr val="22282E"/>
-                </a:solidFill>
-              </a:rPr>
-              <a:t>•  Kibana: interfaz de visualización y análisis. Característica: dashboards, Discover y el motor de detección de Elastic Security.</a:t>
-            </a:r>
-          </a:p>
-          <a:p>
-            <a:pPr>
-              <a:spcAft>
-                <a:spcPts val="600"/>
-              </a:spcAft>
-            </a:pPr>
-            <a:r>
-              <a:rPr sz="1500">
-                <a:solidFill>
-                  <a:srgbClr val="22282E"/>
-                </a:solidFill>
-              </a:rPr>
-              <a:t>•  Beats: agentes ligeros (Winlogbeat, Filebeat, Packetbeat). Característica: cada uno especializado en un tipo de dato.</a:t>
-            </a:r>
-          </a:p>
-          <a:p>
-            <a:pPr>
-              <a:spcAft>
-                <a:spcPts val="600"/>
-              </a:spcAft>
-            </a:pPr>
-            <a:r>
-              <a:rPr sz="1500">
-                <a:solidFill>
-                  <a:srgbClr val="22282E"/>
-                </a:solidFill>
-              </a:rPr>
-              <a:t>•  KQL (Kibana Query Language): lenguaje de filtrado interactivo. Característica: simple, ideal para exploración.</a:t>
-            </a:r>
-          </a:p>
-          <a:p>
-            <a:pPr>
-              <a:spcAft>
-                <a:spcPts val="600"/>
-              </a:spcAft>
-            </a:pPr>
-            <a:r>
-              <a:rPr sz="1500">
-                <a:solidFill>
-                  <a:srgbClr val="22282E"/>
-                </a:solidFill>
-              </a:rPr>
-              <a:t>•  EQL (Event Query Language): consulta secuencias de eventos ordenados. Característica: perfecto para detectar cadenas de ataque (proceso→red→persistencia).</a:t>
-            </a:r>
-          </a:p>
-          <a:p>
-            <a:pPr>
-              <a:spcAft>
-                <a:spcPts val="600"/>
-              </a:spcAft>
-            </a:pPr>
-            <a:r>
-              <a:rPr sz="1500">
-                <a:solidFill>
-                  <a:srgbClr val="22282E"/>
-                </a:solidFill>
-              </a:rPr>
-              <a:t>•  Wazuh: plataforma open source que combina HIDS, SIEM y gestión de cumplimiento. Característica: motor de reglas con niveles de severidad y mapeo ATT&amp;CK.</a:t>
-            </a:r>
-          </a:p>
-          <a:p>
-            <a:pPr>
-              <a:spcAft>
-                <a:spcPts val="600"/>
-              </a:spcAft>
-            </a:pPr>
-            <a:r>
-              <a:rPr sz="1500">
-                <a:solidFill>
-                  <a:srgbClr val="22282E"/>
-                </a:solidFill>
-              </a:rPr>
-              <a:t>•  Decoder (Wazuh): extrae campos de un log crudo antes de evaluarlo contra reglas. Característica: paso previo a la correlación.</a:t>
+              <a:t>•  Elastic Security y Wazuh pueden compartir componentes, pero no son productos intercambiables. En Elastic, la investigación y la detección se apoyan en documentos indexados, Elastic Common Schema…</a:t>
+            </a:r>
+          </a:p>
+          <a:p>
+            <a:pPr>
+              <a:spcAft>
+                <a:spcPts val="600"/>
+              </a:spcAft>
+            </a:pPr>
+            <a:r>
+              <a:rPr sz="1500">
+                <a:solidFill>
+                  <a:srgbClr val="22282E"/>
+                </a:solidFill>
+              </a:rPr>
+              <a:t>•  ECS es un contrato de campos; KQL filtra documentos y EQL expresa secuencias o relaciones temporales. Confundirlos lleva a reglas que parecen equivalentes pero no lo son. En Wazuh, un decoder…</a:t>
+            </a:r>
+          </a:p>
+          <a:p>
+            <a:pPr>
+              <a:spcAft>
+                <a:spcPts val="600"/>
+              </a:spcAft>
+            </a:pPr>
+            <a:r>
+              <a:rPr sz="1500">
+                <a:solidFill>
+                  <a:srgbClr val="22282E"/>
+                </a:solidFill>
+              </a:rPr>
+              <a:t>•  El contenido preconstruido acelera el inicio, no elimina la ingeniería. Cada regla debe comprobar fuente requerida, versión, campos, impacto en rendimiento y supuestos ambientales. Para evaluar…</a:t>
+            </a:r>
+          </a:p>
+          <a:p>
+            <a:pPr>
+              <a:spcAft>
+                <a:spcPts val="600"/>
+              </a:spcAft>
+            </a:pPr>
+            <a:r>
+              <a:rPr sz="1500">
+                <a:solidFill>
+                  <a:srgbClr val="22282E"/>
+                </a:solidFill>
+              </a:rPr>
+              <a:t>•  Supongamos que se quiere detectar la creación inesperada de un usuario local. En Elastic se verifica que el agente recoja el evento, que el pipeline lo convierta a ECS sin perder el mensaje original…</a:t>
+            </a:r>
+          </a:p>
+          <a:p>
+            <a:pPr>
+              <a:spcAft>
+                <a:spcPts val="600"/>
+              </a:spcAft>
+            </a:pPr>
+            <a:r>
+              <a:rPr sz="1500">
+                <a:solidFill>
+                  <a:srgbClr val="22282E"/>
+                </a:solidFill>
+              </a:rPr>
+              <a:t>•  KQL resulta apropiado para filtrar documentos: «muéstrame eventos con este host y acción». EQL aporta secuencia: «una creación de cuenta seguida de incorporación a un grupo privilegiado en el mismo…</a:t>
+            </a:r>
+          </a:p>
+          <a:p>
+            <a:pPr>
+              <a:spcAft>
+                <a:spcPts val="600"/>
+              </a:spcAft>
+            </a:pPr>
+            <a:r>
+              <a:rPr sz="1500">
+                <a:solidFill>
+                  <a:srgbClr val="22282E"/>
+                </a:solidFill>
+              </a:rPr>
+              <a:t>•  El diagrama paralelo se lee desde la hipótesis común hacia atrás y hacia adelante. Hacia atrás pregunta si cada plataforma posee el dato equivalente; hacia adelante compara qué alerta, contexto y…</a:t>
+            </a:r>
+          </a:p>
+          <a:p>
+            <a:pPr>
+              <a:spcAft>
+                <a:spcPts val="600"/>
+              </a:spcAft>
+            </a:pPr>
+            <a:r>
+              <a:rPr sz="1500">
+                <a:solidFill>
+                  <a:srgbClr val="22282E"/>
+                </a:solidFill>
+              </a:rPr>
+              <a:t>•  En Elastic, mappings incompatibles pueden rechazar documentos o volver un campo no consultable como se esperaba; los ingest pipelines necesitan métricas de fallos. En Wazuh, una actualización de…</a:t>
             </a:r>
           </a:p>
         </p:txBody>
@@ -4271,7 +4962,7 @@
                   <a:srgbClr val="0B3D2E"/>
                 </a:solidFill>
               </a:rPr>
-              <a:t>🧰 Herramientas y preparación</a:t>
+              <a:t>📔 Glosario</a:t>
             </a:r>
           </a:p>
         </p:txBody>
@@ -4309,82 +5000,97 @@
                   <a:srgbClr val="22282E"/>
                 </a:solidFill>
               </a:rPr>
-              <a:t>•  En laboratorio aislado:</a:t>
-            </a:r>
-          </a:p>
-          <a:p>
-            <a:pPr>
-              <a:spcAft>
-                <a:spcPts val="600"/>
-              </a:spcAft>
-            </a:pPr>
-            <a:r>
-              <a:rPr sz="1500">
-                <a:solidFill>
-                  <a:srgbClr val="22282E"/>
-                </a:solidFill>
-              </a:rPr>
-              <a:t>•  Elastic Stack vía Docker (docker-compose oficial de Elastic) o la instalación de Elastic Security.</a:t>
-            </a:r>
-          </a:p>
-          <a:p>
-            <a:pPr>
-              <a:spcAft>
-                <a:spcPts val="600"/>
-              </a:spcAft>
-            </a:pPr>
-            <a:r>
-              <a:rPr sz="1500">
-                <a:solidFill>
-                  <a:srgbClr val="22282E"/>
-                </a:solidFill>
-              </a:rPr>
-              <a:t>•  Winlogbeat/Filebeat/Packetbeat en tus máquinas de prueba.</a:t>
-            </a:r>
-          </a:p>
-          <a:p>
-            <a:pPr>
-              <a:spcAft>
-                <a:spcPts val="600"/>
-              </a:spcAft>
-            </a:pPr>
-            <a:r>
-              <a:rPr sz="1500">
-                <a:solidFill>
-                  <a:srgbClr val="22282E"/>
-                </a:solidFill>
-              </a:rPr>
-              <a:t>•  Wazuh con su despliegue Docker de un solo nodo (manager + indexer + dashboard).</a:t>
-            </a:r>
-          </a:p>
-          <a:p>
-            <a:pPr>
-              <a:spcAft>
-                <a:spcPts val="600"/>
-              </a:spcAft>
-            </a:pPr>
-            <a:r>
-              <a:rPr sz="1500">
-                <a:solidFill>
-                  <a:srgbClr val="22282E"/>
-                </a:solidFill>
-              </a:rPr>
-              <a:t>•  Agente Wazuh instalado en el Windows y el Linux de laboratorio.</a:t>
-            </a:r>
-          </a:p>
-          <a:p>
-            <a:pPr>
-              <a:spcAft>
-                <a:spcPts val="600"/>
-              </a:spcAft>
-            </a:pPr>
-            <a:r>
-              <a:rPr sz="1500">
-                <a:solidFill>
-                  <a:srgbClr val="22282E"/>
-                </a:solidFill>
-              </a:rPr>
-              <a:t>•  Todo dentro de tu red de pruebas; el FIM y la detección se prueban con cambios que tú mismo provocas.</a:t>
+              <a:t>•  ECS: esquema común de eventos de Elastic.</a:t>
+            </a:r>
+          </a:p>
+          <a:p>
+            <a:pPr>
+              <a:spcAft>
+                <a:spcPts val="600"/>
+              </a:spcAft>
+            </a:pPr>
+            <a:r>
+              <a:rPr sz="1500">
+                <a:solidFill>
+                  <a:srgbClr val="22282E"/>
+                </a:solidFill>
+              </a:rPr>
+              <a:t>•  KQL: lenguaje de filtrado de Kibana.</a:t>
+            </a:r>
+          </a:p>
+          <a:p>
+            <a:pPr>
+              <a:spcAft>
+                <a:spcPts val="600"/>
+              </a:spcAft>
+            </a:pPr>
+            <a:r>
+              <a:rPr sz="1500">
+                <a:solidFill>
+                  <a:srgbClr val="22282E"/>
+                </a:solidFill>
+              </a:rPr>
+              <a:t>•  EQL: lenguaje para secuencias y relaciones entre eventos.</a:t>
+            </a:r>
+          </a:p>
+          <a:p>
+            <a:pPr>
+              <a:spcAft>
+                <a:spcPts val="600"/>
+              </a:spcAft>
+            </a:pPr>
+            <a:r>
+              <a:rPr sz="1500">
+                <a:solidFill>
+                  <a:srgbClr val="22282E"/>
+                </a:solidFill>
+              </a:rPr>
+              <a:t>•  Ingest pipeline: transformaciones aplicadas antes de indexar.</a:t>
+            </a:r>
+          </a:p>
+          <a:p>
+            <a:pPr>
+              <a:spcAft>
+                <a:spcPts val="600"/>
+              </a:spcAft>
+            </a:pPr>
+            <a:r>
+              <a:rPr sz="1500">
+                <a:solidFill>
+                  <a:srgbClr val="22282E"/>
+                </a:solidFill>
+              </a:rPr>
+              <a:t>•  Decoder: lógica de Wazuh que extrae campos del mensaje.</a:t>
+            </a:r>
+          </a:p>
+          <a:p>
+            <a:pPr>
+              <a:spcAft>
+                <a:spcPts val="600"/>
+              </a:spcAft>
+            </a:pPr>
+            <a:r>
+              <a:rPr sz="1500">
+                <a:solidFill>
+                  <a:srgbClr val="22282E"/>
+                </a:solidFill>
+              </a:rPr>
+              <a:t>•  Ruleset: conjunto versionado de reglas.</a:t>
+            </a:r>
+          </a:p>
+          <a:p>
+            <a:pPr>
+              <a:spcAft>
+                <a:spcPts val="600"/>
+              </a:spcAft>
+            </a:pPr>
+            <a:r>
+              <a:rPr sz="1500">
+                <a:solidFill>
+                  <a:srgbClr val="22282E"/>
+                </a:solidFill>
+              </a:rPr>
+              <a:t>•  FIM: monitoreo de integridad de archivos.</a:t>
             </a:r>
           </a:p>
         </p:txBody>
@@ -4435,7 +5141,7 @@
                   <a:srgbClr val="0B3D2E"/>
                 </a:solidFill>
               </a:rPr>
-              <a:t>🧪 Laboratorio guiado — Doble stack de detección</a:t>
+              <a:t>📖 Definiciones y características</a:t>
             </a:r>
           </a:p>
         </p:txBody>
@@ -4473,97 +5179,97 @@
                   <a:srgbClr val="22282E"/>
                 </a:solidFill>
               </a:rPr>
-              <a:t>•  Levanta Elastic. docker compose up -d con el stack oficial. Accede a Kibana y crea el usuario de kibana.</a:t>
-            </a:r>
-          </a:p>
-          <a:p>
-            <a:pPr>
-              <a:spcAft>
-                <a:spcPts val="600"/>
-              </a:spcAft>
-            </a:pPr>
-            <a:r>
-              <a:rPr sz="1500">
-                <a:solidFill>
-                  <a:srgbClr val="22282E"/>
-                </a:solidFill>
-              </a:rPr>
-              <a:t>•  Ingesta endpoint. Instala Winlogbeat con el módulo sysmon y verifica en Discover que llegan eventos ECS (process.commandline).</a:t>
-            </a:r>
-          </a:p>
-          <a:p>
-            <a:pPr>
-              <a:spcAft>
-                <a:spcPts val="600"/>
-              </a:spcAft>
-            </a:pPr>
-            <a:r>
-              <a:rPr sz="1500">
-                <a:solidFill>
-                  <a:srgbClr val="22282E"/>
-                </a:solidFill>
-              </a:rPr>
-              <a:t>•  Consulta con KQL. En Discover: event.code:1 and process.parent.name:"WINWORD.EXE" and process.name:("powershell.exe" or "cmd.exe").</a:t>
-            </a:r>
-          </a:p>
-          <a:p>
-            <a:pPr>
-              <a:spcAft>
-                <a:spcPts val="600"/>
-              </a:spcAft>
-            </a:pPr>
-            <a:r>
-              <a:rPr sz="1500">
-                <a:solidFill>
-                  <a:srgbClr val="22282E"/>
-                </a:solidFill>
-              </a:rPr>
-              <a:t>•  Detecta secuencias con EQL. En Elastic Security escribe una regla EQL:</a:t>
-            </a:r>
-          </a:p>
-          <a:p>
-            <a:pPr>
-              <a:spcAft>
-                <a:spcPts val="600"/>
-              </a:spcAft>
-            </a:pPr>
-            <a:r>
-              <a:rPr sz="1500">
-                <a:solidFill>
-                  <a:srgbClr val="22282E"/>
-                </a:solidFill>
-              </a:rPr>
-              <a:t>•  sequence by host.id [process where process.name=="powershell.exe"] [network where destination.port==443]</a:t>
-            </a:r>
-          </a:p>
-          <a:p>
-            <a:pPr>
-              <a:spcAft>
-                <a:spcPts val="600"/>
-              </a:spcAft>
-            </a:pPr>
-            <a:r>
-              <a:rPr sz="1500">
-                <a:solidFill>
-                  <a:srgbClr val="22282E"/>
-                </a:solidFill>
-              </a:rPr>
-              <a:t>•  Levanta Wazuh. Despliega el stack Docker de Wazuh; instala el agente en tus máquinas y confírmalo en el dashboard.</a:t>
-            </a:r>
-          </a:p>
-          <a:p>
-            <a:pPr>
-              <a:spcAft>
-                <a:spcPts val="600"/>
-              </a:spcAft>
-            </a:pPr>
-            <a:r>
-              <a:rPr sz="1500">
-                <a:solidFill>
-                  <a:srgbClr val="22282E"/>
-                </a:solidFill>
-              </a:rPr>
-              <a:t>•  Provoca una alerta. Modifica un archivo monitoreado por FIM (/etc/passwd o una carpeta bajo vigilancia) y observa la alerta con su nivel y regla.</a:t>
+              <a:t>•  Elasticsearch: motor de búsqueda e indexación distribuido. Característica: búsquedas rápidas sobre grandes volúmenes vía índices invertidos.</a:t>
+            </a:r>
+          </a:p>
+          <a:p>
+            <a:pPr>
+              <a:spcAft>
+                <a:spcPts val="600"/>
+              </a:spcAft>
+            </a:pPr>
+            <a:r>
+              <a:rPr sz="1500">
+                <a:solidFill>
+                  <a:srgbClr val="22282E"/>
+                </a:solidFill>
+              </a:rPr>
+              <a:t>•  Kibana: interfaz de visualización y análisis. Característica: dashboards, Discover y el motor de detección de Elastic Security.</a:t>
+            </a:r>
+          </a:p>
+          <a:p>
+            <a:pPr>
+              <a:spcAft>
+                <a:spcPts val="600"/>
+              </a:spcAft>
+            </a:pPr>
+            <a:r>
+              <a:rPr sz="1500">
+                <a:solidFill>
+                  <a:srgbClr val="22282E"/>
+                </a:solidFill>
+              </a:rPr>
+              <a:t>•  Beats: agentes ligeros (Winlogbeat, Filebeat, Packetbeat). Característica: cada uno especializado en un tipo de dato.</a:t>
+            </a:r>
+          </a:p>
+          <a:p>
+            <a:pPr>
+              <a:spcAft>
+                <a:spcPts val="600"/>
+              </a:spcAft>
+            </a:pPr>
+            <a:r>
+              <a:rPr sz="1500">
+                <a:solidFill>
+                  <a:srgbClr val="22282E"/>
+                </a:solidFill>
+              </a:rPr>
+              <a:t>•  KQL (Kibana Query Language): lenguaje de filtrado interactivo. Característica: simple, ideal para exploración.</a:t>
+            </a:r>
+          </a:p>
+          <a:p>
+            <a:pPr>
+              <a:spcAft>
+                <a:spcPts val="600"/>
+              </a:spcAft>
+            </a:pPr>
+            <a:r>
+              <a:rPr sz="1500">
+                <a:solidFill>
+                  <a:srgbClr val="22282E"/>
+                </a:solidFill>
+              </a:rPr>
+              <a:t>•  EQL (Event Query Language): consulta secuencias de eventos ordenados. Característica: perfecto para detectar cadenas de ataque (proceso→red→persistencia).</a:t>
+            </a:r>
+          </a:p>
+          <a:p>
+            <a:pPr>
+              <a:spcAft>
+                <a:spcPts val="600"/>
+              </a:spcAft>
+            </a:pPr>
+            <a:r>
+              <a:rPr sz="1500">
+                <a:solidFill>
+                  <a:srgbClr val="22282E"/>
+                </a:solidFill>
+              </a:rPr>
+              <a:t>•  Wazuh: plataforma open source que combina HIDS, SIEM y gestión de cumplimiento. Característica: motor de reglas con niveles de severidad y mapeo ATT&amp;CK.</a:t>
+            </a:r>
+          </a:p>
+          <a:p>
+            <a:pPr>
+              <a:spcAft>
+                <a:spcPts val="600"/>
+              </a:spcAft>
+            </a:pPr>
+            <a:r>
+              <a:rPr sz="1500">
+                <a:solidFill>
+                  <a:srgbClr val="22282E"/>
+                </a:solidFill>
+              </a:rPr>
+              <a:t>•  Decoder (Wazuh): extrae campos de un log crudo antes de evaluarlo contra reglas. Característica: paso previo a la correlación.</a:t>
             </a:r>
           </a:p>
         </p:txBody>
@@ -4614,7 +5320,7 @@
                   <a:srgbClr val="0B3D2E"/>
                 </a:solidFill>
               </a:rPr>
-              <a:t>✍️ Ejercicios</a:t>
+              <a:t>🔍 Comparación aplicada — alta inesperada de una cuenta</a:t>
             </a:r>
           </a:p>
         </p:txBody>
@@ -4652,82 +5358,52 @@
                   <a:srgbClr val="22282E"/>
                 </a:solidFill>
               </a:rPr>
-              <a:t>•  Escribe 3 consultas KQL para hunting de PowerShell ofuscado.</a:t>
-            </a:r>
-          </a:p>
-          <a:p>
-            <a:pPr>
-              <a:spcAft>
-                <a:spcPts val="600"/>
-              </a:spcAft>
-            </a:pPr>
-            <a:r>
-              <a:rPr sz="1500">
-                <a:solidFill>
-                  <a:srgbClr val="22282E"/>
-                </a:solidFill>
-              </a:rPr>
-              <a:t>•  Traduce una detección de la clase 184 (Splunk SPL) a EQL de Elastic.</a:t>
-            </a:r>
-          </a:p>
-          <a:p>
-            <a:pPr>
-              <a:spcAft>
-                <a:spcPts val="600"/>
-              </a:spcAft>
-            </a:pPr>
-            <a:r>
-              <a:rPr sz="1500">
-                <a:solidFill>
-                  <a:srgbClr val="22282E"/>
-                </a:solidFill>
-              </a:rPr>
-              <a:t>•  Explica la diferencia entre un decoder y una regla en Wazuh con un ejemplo.</a:t>
-            </a:r>
-          </a:p>
-          <a:p>
-            <a:pPr>
-              <a:spcAft>
-                <a:spcPts val="600"/>
-              </a:spcAft>
-            </a:pPr>
-            <a:r>
-              <a:rPr sz="1500">
-                <a:solidFill>
-                  <a:srgbClr val="22282E"/>
-                </a:solidFill>
-              </a:rPr>
-              <a:t>•  Habilita FIM sobre una carpeta y documenta la alerta generada.</a:t>
-            </a:r>
-          </a:p>
-          <a:p>
-            <a:pPr>
-              <a:spcAft>
-                <a:spcPts val="600"/>
-              </a:spcAft>
-            </a:pPr>
-            <a:r>
-              <a:rPr sz="1500">
-                <a:solidFill>
-                  <a:srgbClr val="22282E"/>
-                </a:solidFill>
-              </a:rPr>
-              <a:t>•  Compara Elastic vs Wazuh vs Splunk en coste, curva de aprendizaje y capacidades.</a:t>
-            </a:r>
-          </a:p>
-          <a:p>
-            <a:pPr>
-              <a:spcAft>
-                <a:spcPts val="600"/>
-              </a:spcAft>
-            </a:pPr>
-            <a:r>
-              <a:rPr sz="1500">
-                <a:solidFill>
-                  <a:srgbClr val="22282E"/>
-                </a:solidFill>
-              </a:rPr>
-              <a:t>•  Crea una regla local de Wazuh que eleve la severidad de un patrón concreto.</a:t>
+              <a:t>•  Se usa un mismo conjunto de eventos: creación de usuario local, incorporación posterior a administradores y una creación legítima aprobada. La pregunta no es qué interfaz resulta más cómoda, sino si…</a:t>
+            </a:r>
+          </a:p>
+          <a:p>
+            <a:pPr>
+              <a:spcAft>
+                <a:spcPts val="600"/>
+              </a:spcAft>
+            </a:pPr>
+            <a:r>
+              <a:rPr sz="1500">
+                <a:solidFill>
+                  <a:srgbClr val="22282E"/>
+                </a:solidFill>
+              </a:rPr>
+              <a:t>•  En Elastic se inspecciona el documento original, el ingest pipeline y el mapeo ECS. KQL confirma presencia y EQL expresa una secuencia por host/cuenta dentro de un maxspan. Se comprueba qué ocurre si…</a:t>
+            </a:r>
+          </a:p>
+          <a:p>
+            <a:pPr>
+              <a:spcAft>
+                <a:spcPts val="600"/>
+              </a:spcAft>
+            </a:pPr>
+            <a:r>
+              <a:rPr sz="1500">
+                <a:solidFill>
+                  <a:srgbClr val="22282E"/>
+                </a:solidFill>
+              </a:rPr>
+              <a:t>•  El caso legítimo debe quedar explicado por contexto estrecho, como host de aprovisionamiento, cuenta autorizada y ventana de cambio. Excluir todas las creaciones en servidores borraría la conducta…</a:t>
+            </a:r>
+          </a:p>
+          <a:p>
+            <a:pPr>
+              <a:spcAft>
+                <a:spcPts val="600"/>
+              </a:spcAft>
+            </a:pPr>
+            <a:r>
+              <a:rPr sz="1500">
+                <a:solidFill>
+                  <a:srgbClr val="22282E"/>
+                </a:solidFill>
+              </a:rPr>
+              <a:t>•  FIM se evalúa con la misma disciplina. Se modifica un archivo controlado en una ruta vigilada, se verifica qué metadatos ofrece el agente y se repite una actualización legítima. Si la alerta no puede…</a:t>
             </a:r>
           </a:p>
         </p:txBody>
@@ -4778,7 +5454,7 @@
                   <a:srgbClr val="0B3D2E"/>
                 </a:solidFill>
               </a:rPr>
-              <a:t>📝 Reto verificable</a:t>
+              <a:t>✅ Criterio de dominio</a:t>
             </a:r>
           </a:p>
         </p:txBody>
@@ -4816,7 +5492,7 @@
                   <a:srgbClr val="22282E"/>
                 </a:solidFill>
               </a:rPr>
-              <a:t>•  Despliega ambos stacks y demuestra una detección en cada uno: una regla EQL en Elastic que capture una secuencia proceso→red, y una alerta de Wazuh (FIM o regla) con su técnica ATT&amp;CK. Criterio de aceptación: ambas alertas se disparan con tu actividad simulada y puedes mostrar en Kibana/Wazuh el evento, la regla que lo detectó y la técnica ATT&amp;CK asociada.</a:t>
+              <a:t>•  El alumno puede explicar ECS, KQL, EQL, decoder y ruleset en su función exacta; reproduce positivos y negativos en ambas plataformas y justifica por qué resultados parecidos recorren arquitecturas…</a:t>
             </a:r>
           </a:p>
         </p:txBody>
